--- a/decks/MIPF_Day6_PF_Construction_Deck.pptx
+++ b/decks/MIPF_Day6_PF_Construction_Deck.pptx
@@ -6369,7 +6369,7 @@
                 </a:solidFill>
                 <a:latin typeface="Calibri"/>
               </a:rPr>
-              <a:t>Tuesday 20th October 2026  |  Facilitator: Promise Godbold</a:t>
+              <a:t>Wednesday 21st October 2026  |  Facilitator: Promise Godbold</a:t>
             </a:r>
           </a:p>
         </p:txBody>
@@ -6601,7 +6601,7 @@
                 </a:solidFill>
                 <a:latin typeface="Calibri"/>
               </a:rPr>
-              <a:t>MIPF Boot Camp  |  Day 6  |  Tue 20 Oct 2026  |  Project finance modelling I: construction and funding</a:t>
+              <a:t>MIPF Boot Camp  |  Day 6  |  Wed 21 Oct 2026  |  Project finance modelling I: construction and funding</a:t>
             </a:r>
           </a:p>
         </p:txBody>
@@ -7968,7 +7968,7 @@
                 </a:solidFill>
                 <a:latin typeface="Calibri"/>
               </a:rPr>
-              <a:t>MIPF Boot Camp  |  Day 6  |  Tue 20 Oct 2026  |  Project finance modelling I: construction and funding</a:t>
+              <a:t>MIPF Boot Camp  |  Day 6  |  Wed 21 Oct 2026  |  Project finance modelling I: construction and funding</a:t>
             </a:r>
           </a:p>
         </p:txBody>
@@ -9055,7 +9055,7 @@
                 </a:solidFill>
                 <a:latin typeface="Calibri"/>
               </a:rPr>
-              <a:t>MIPF Boot Camp  |  Day 6  |  Tue 20 Oct 2026  |  Project finance modelling I: construction and funding</a:t>
+              <a:t>MIPF Boot Camp  |  Day 6  |  Wed 21 Oct 2026  |  Project finance modelling I: construction and funding</a:t>
             </a:r>
           </a:p>
         </p:txBody>
@@ -10088,7 +10088,7 @@
                 </a:solidFill>
                 <a:latin typeface="Calibri"/>
               </a:rPr>
-              <a:t>MIPF Boot Camp  |  Day 6  |  Tue 20 Oct 2026  |  Project finance modelling I: construction and funding</a:t>
+              <a:t>MIPF Boot Camp  |  Day 6  |  Wed 21 Oct 2026  |  Project finance modelling I: construction and funding</a:t>
             </a:r>
           </a:p>
         </p:txBody>
@@ -13545,7 +13545,7 @@
                 </a:solidFill>
                 <a:latin typeface="Calibri"/>
               </a:rPr>
-              <a:t>MIPF Boot Camp  |  Day 6  |  Tue 20 Oct 2026  |  Project finance modelling I: construction and funding</a:t>
+              <a:t>MIPF Boot Camp  |  Day 6  |  Wed 21 Oct 2026  |  Project finance modelling I: construction and funding</a:t>
             </a:r>
           </a:p>
         </p:txBody>
@@ -14765,7 +14765,7 @@
                 </a:solidFill>
                 <a:latin typeface="Calibri"/>
               </a:rPr>
-              <a:t>MIPF Boot Camp  |  Day 6  |  Tue 20 Oct 2026  |  Project finance modelling I: construction and funding</a:t>
+              <a:t>MIPF Boot Camp  |  Day 6  |  Wed 21 Oct 2026  |  Project finance modelling I: construction and funding</a:t>
             </a:r>
           </a:p>
         </p:txBody>
@@ -15985,7 +15985,7 @@
                 </a:solidFill>
                 <a:latin typeface="Calibri"/>
               </a:rPr>
-              <a:t>MIPF Boot Camp  |  Day 6  |  Tue 20 Oct 2026  |  Project finance modelling I: construction and funding</a:t>
+              <a:t>MIPF Boot Camp  |  Day 6  |  Wed 21 Oct 2026  |  Project finance modelling I: construction and funding</a:t>
             </a:r>
           </a:p>
         </p:txBody>
@@ -16826,7 +16826,7 @@
                 </a:solidFill>
                 <a:latin typeface="Calibri"/>
               </a:rPr>
-              <a:t>MIPF Boot Camp  |  Day 6  |  Tue 20 Oct 2026  |  Project finance modelling I: construction and funding</a:t>
+              <a:t>MIPF Boot Camp  |  Day 6  |  Wed 21 Oct 2026  |  Project finance modelling I: construction and funding</a:t>
             </a:r>
           </a:p>
         </p:txBody>
@@ -17134,7 +17134,7 @@
                 </a:solidFill>
                 <a:latin typeface="Calibri"/>
               </a:rPr>
-              <a:t>MIPF Boot Camp  |  Day 6  |  Tue 20 Oct 2026  |  Project finance modelling I: construction and funding</a:t>
+              <a:t>MIPF Boot Camp  |  Day 6  |  Wed 21 Oct 2026  |  Project finance modelling I: construction and funding</a:t>
             </a:r>
           </a:p>
         </p:txBody>
@@ -17940,7 +17940,7 @@
                 </a:solidFill>
                 <a:latin typeface="Calibri"/>
               </a:rPr>
-              <a:t>MIPF Boot Camp  |  Day 6  |  Tue 20 Oct 2026  |  Project finance modelling I: construction and funding</a:t>
+              <a:t>MIPF Boot Camp  |  Day 6  |  Wed 21 Oct 2026  |  Project finance modelling I: construction and funding</a:t>
             </a:r>
           </a:p>
         </p:txBody>
@@ -18309,7 +18309,7 @@
                 </a:solidFill>
                 <a:latin typeface="Calibri"/>
               </a:rPr>
-              <a:t>MIPF Boot Camp  |  Day 6  |  Tue 20 Oct 2026  |  Project finance modelling I: construction and funding</a:t>
+              <a:t>MIPF Boot Camp  |  Day 6  |  Wed 21 Oct 2026  |  Project finance modelling I: construction and funding</a:t>
             </a:r>
           </a:p>
         </p:txBody>
@@ -19040,7 +19040,7 @@
                 </a:solidFill>
                 <a:latin typeface="Calibri"/>
               </a:rPr>
-              <a:t>MIPF Boot Camp  |  Day 6  |  Tue 20 Oct 2026  |  Project finance modelling I: construction and funding</a:t>
+              <a:t>MIPF Boot Camp  |  Day 6  |  Wed 21 Oct 2026  |  Project finance modelling I: construction and funding</a:t>
             </a:r>
           </a:p>
         </p:txBody>
@@ -20384,7 +20384,7 @@
                 </a:solidFill>
                 <a:latin typeface="Calibri"/>
               </a:rPr>
-              <a:t>MIPF Boot Camp  |  Day 6  |  Tue 20 Oct 2026  |  Project finance modelling I: construction and funding</a:t>
+              <a:t>MIPF Boot Camp  |  Day 6  |  Wed 21 Oct 2026  |  Project finance modelling I: construction and funding</a:t>
             </a:r>
           </a:p>
         </p:txBody>
@@ -21662,7 +21662,7 @@
                 </a:solidFill>
                 <a:latin typeface="Calibri"/>
               </a:rPr>
-              <a:t>MIPF Boot Camp  |  Day 6  |  Tue 20 Oct 2026  |  Project finance modelling I: construction and funding</a:t>
+              <a:t>MIPF Boot Camp  |  Day 6  |  Wed 21 Oct 2026  |  Project finance modelling I: construction and funding</a:t>
             </a:r>
           </a:p>
         </p:txBody>
@@ -22952,7 +22952,7 @@
                 </a:solidFill>
                 <a:latin typeface="Calibri"/>
               </a:rPr>
-              <a:t>MIPF Boot Camp  |  Day 6  |  Tue 20 Oct 2026  |  Project finance modelling I: construction and funding</a:t>
+              <a:t>MIPF Boot Camp  |  Day 6  |  Wed 21 Oct 2026  |  Project finance modelling I: construction and funding</a:t>
             </a:r>
           </a:p>
         </p:txBody>
@@ -24287,7 +24287,7 @@
                 </a:solidFill>
                 <a:latin typeface="Calibri"/>
               </a:rPr>
-              <a:t>MIPF Boot Camp  |  Day 6  |  Tue 20 Oct 2026  |  Project finance modelling I: construction and funding</a:t>
+              <a:t>MIPF Boot Camp  |  Day 6  |  Wed 21 Oct 2026  |  Project finance modelling I: construction and funding</a:t>
             </a:r>
           </a:p>
         </p:txBody>
@@ -25565,7 +25565,7 @@
                 </a:solidFill>
                 <a:latin typeface="Calibri"/>
               </a:rPr>
-              <a:t>MIPF Boot Camp  |  Day 6  |  Tue 20 Oct 2026  |  Project finance modelling I: construction and funding</a:t>
+              <a:t>MIPF Boot Camp  |  Day 6  |  Wed 21 Oct 2026  |  Project finance modelling I: construction and funding</a:t>
             </a:r>
           </a:p>
         </p:txBody>
@@ -26316,7 +26316,7 @@
                 </a:solidFill>
                 <a:latin typeface="Calibri"/>
               </a:rPr>
-              <a:t>MIPF Boot Camp  |  Day 6  |  Tue 20 Oct 2026  |  Project finance modelling I: construction and funding</a:t>
+              <a:t>MIPF Boot Camp  |  Day 6  |  Wed 21 Oct 2026  |  Project finance modelling I: construction and funding</a:t>
             </a:r>
           </a:p>
         </p:txBody>
@@ -27536,7 +27536,7 @@
                 </a:solidFill>
                 <a:latin typeface="Calibri"/>
               </a:rPr>
-              <a:t>MIPF Boot Camp  |  Day 6  |  Tue 20 Oct 2026  |  Project finance modelling I: construction and funding</a:t>
+              <a:t>MIPF Boot Camp  |  Day 6  |  Wed 21 Oct 2026  |  Project finance modelling I: construction and funding</a:t>
             </a:r>
           </a:p>
         </p:txBody>
@@ -29341,7 +29341,7 @@
                 </a:solidFill>
                 <a:latin typeface="Calibri"/>
               </a:rPr>
-              <a:t>MIPF Boot Camp  |  Day 6  |  Tue 20 Oct 2026  |  Project finance modelling I: construction and funding</a:t>
+              <a:t>MIPF Boot Camp  |  Day 6  |  Wed 21 Oct 2026  |  Project finance modelling I: construction and funding</a:t>
             </a:r>
           </a:p>
         </p:txBody>
@@ -30076,7 +30076,7 @@
                 </a:solidFill>
                 <a:latin typeface="Calibri"/>
               </a:rPr>
-              <a:t>MIPF Boot Camp  |  Day 6  |  Tue 20 Oct 2026  |  Project finance modelling I: construction and funding</a:t>
+              <a:t>MIPF Boot Camp  |  Day 6  |  Wed 21 Oct 2026  |  Project finance modelling I: construction and funding</a:t>
             </a:r>
           </a:p>
         </p:txBody>
@@ -30384,7 +30384,7 @@
                 </a:solidFill>
                 <a:latin typeface="Calibri"/>
               </a:rPr>
-              <a:t>MIPF Boot Camp  |  Day 6  |  Tue 20 Oct 2026  |  Project finance modelling I: construction and funding</a:t>
+              <a:t>MIPF Boot Camp  |  Day 6  |  Wed 21 Oct 2026  |  Project finance modelling I: construction and funding</a:t>
             </a:r>
           </a:p>
         </p:txBody>
@@ -30819,7 +30819,7 @@
                 </a:solidFill>
                 <a:latin typeface="Calibri"/>
               </a:rPr>
-              <a:t>MIPF Boot Camp  |  Day 6  |  Tue 20 Oct 2026  |  Project finance modelling I: construction and funding</a:t>
+              <a:t>MIPF Boot Camp  |  Day 6  |  Wed 21 Oct 2026  |  Project finance modelling I: construction and funding</a:t>
             </a:r>
           </a:p>
         </p:txBody>
@@ -31465,7 +31465,7 @@
                 </a:solidFill>
                 <a:latin typeface="Calibri"/>
               </a:rPr>
-              <a:t>MIPF Boot Camp  |  Day 6  |  Tue 20 Oct 2026  |  Project finance modelling I: construction and funding</a:t>
+              <a:t>MIPF Boot Camp  |  Day 6  |  Wed 21 Oct 2026  |  Project finance modelling I: construction and funding</a:t>
             </a:r>
           </a:p>
         </p:txBody>
@@ -32797,7 +32797,7 @@
                 </a:solidFill>
                 <a:latin typeface="Calibri"/>
               </a:rPr>
-              <a:t>MIPF Boot Camp  |  Day 6  |  Tue 20 Oct 2026  |  Project finance modelling I: construction and funding</a:t>
+              <a:t>MIPF Boot Camp  |  Day 6  |  Wed 21 Oct 2026  |  Project finance modelling I: construction and funding</a:t>
             </a:r>
           </a:p>
         </p:txBody>
@@ -33981,7 +33981,7 @@
                 </a:solidFill>
                 <a:latin typeface="Calibri"/>
               </a:rPr>
-              <a:t>MIPF Boot Camp  |  Day 6  |  Tue 20 Oct 2026  |  Project finance modelling I: construction and funding</a:t>
+              <a:t>MIPF Boot Camp  |  Day 6  |  Wed 21 Oct 2026  |  Project finance modelling I: construction and funding</a:t>
             </a:r>
           </a:p>
         </p:txBody>
@@ -35153,7 +35153,7 @@
                 </a:solidFill>
                 <a:latin typeface="Calibri"/>
               </a:rPr>
-              <a:t>MIPF Boot Camp  |  Day 6  |  Tue 20 Oct 2026  |  Project finance modelling I: construction and funding</a:t>
+              <a:t>MIPF Boot Camp  |  Day 6  |  Wed 21 Oct 2026  |  Project finance modelling I: construction and funding</a:t>
             </a:r>
           </a:p>
         </p:txBody>
@@ -36389,7 +36389,7 @@
                 </a:solidFill>
                 <a:latin typeface="Calibri"/>
               </a:rPr>
-              <a:t>MIPF Boot Camp  |  Day 6  |  Tue 20 Oct 2026  |  Project finance modelling I: construction and funding</a:t>
+              <a:t>MIPF Boot Camp  |  Day 6  |  Wed 21 Oct 2026  |  Project finance modelling I: construction and funding</a:t>
             </a:r>
           </a:p>
         </p:txBody>
@@ -37591,7 +37591,7 @@
                 </a:solidFill>
                 <a:latin typeface="Calibri"/>
               </a:rPr>
-              <a:t>MIPF Boot Camp  |  Day 6  |  Tue 20 Oct 2026  |  Project finance modelling I: construction and funding</a:t>
+              <a:t>MIPF Boot Camp  |  Day 6  |  Wed 21 Oct 2026  |  Project finance modelling I: construction and funding</a:t>
             </a:r>
           </a:p>
         </p:txBody>
@@ -37960,7 +37960,7 @@
                 </a:solidFill>
                 <a:latin typeface="Calibri"/>
               </a:rPr>
-              <a:t>MIPF Boot Camp  |  Day 6  |  Tue 20 Oct 2026  |  Project finance modelling I: construction and funding</a:t>
+              <a:t>MIPF Boot Camp  |  Day 6  |  Wed 21 Oct 2026  |  Project finance modelling I: construction and funding</a:t>
             </a:r>
           </a:p>
         </p:txBody>
@@ -38695,7 +38695,7 @@
                 </a:solidFill>
                 <a:latin typeface="Calibri"/>
               </a:rPr>
-              <a:t>MIPF Boot Camp  |  Day 6  |  Tue 20 Oct 2026  |  Project finance modelling I: construction and funding</a:t>
+              <a:t>MIPF Boot Camp  |  Day 6  |  Wed 21 Oct 2026  |  Project finance modelling I: construction and funding</a:t>
             </a:r>
           </a:p>
         </p:txBody>
@@ -39003,7 +39003,7 @@
                 </a:solidFill>
                 <a:latin typeface="Calibri"/>
               </a:rPr>
-              <a:t>MIPF Boot Camp  |  Day 6  |  Tue 20 Oct 2026  |  Project finance modelling I: construction and funding</a:t>
+              <a:t>MIPF Boot Camp  |  Day 6  |  Wed 21 Oct 2026  |  Project finance modelling I: construction and funding</a:t>
             </a:r>
           </a:p>
         </p:txBody>
@@ -39920,7 +39920,7 @@
                 </a:solidFill>
                 <a:latin typeface="Calibri"/>
               </a:rPr>
-              <a:t>MIPF Boot Camp  |  Day 6  |  Tue 20 Oct 2026  |  Project finance modelling I: construction and funding</a:t>
+              <a:t>MIPF Boot Camp  |  Day 6  |  Wed 21 Oct 2026  |  Project finance modelling I: construction and funding</a:t>
             </a:r>
           </a:p>
         </p:txBody>
@@ -40707,7 +40707,7 @@
                 </a:solidFill>
                 <a:latin typeface="Calibri"/>
               </a:rPr>
-              <a:t>MIPF Boot Camp  |  Day 6  |  Tue 20 Oct 2026  |  Project finance modelling I: construction and funding</a:t>
+              <a:t>MIPF Boot Camp  |  Day 6  |  Wed 21 Oct 2026  |  Project finance modelling I: construction and funding</a:t>
             </a:r>
           </a:p>
         </p:txBody>
@@ -41851,7 +41851,7 @@
                 </a:solidFill>
                 <a:latin typeface="Calibri"/>
               </a:rPr>
-              <a:t>MIPF Boot Camp  |  Day 6  |  Tue 20 Oct 2026  |  Project finance modelling I: construction and funding</a:t>
+              <a:t>MIPF Boot Camp  |  Day 6  |  Wed 21 Oct 2026  |  Project finance modelling I: construction and funding</a:t>
             </a:r>
           </a:p>
         </p:txBody>
@@ -42725,7 +42725,7 @@
                 </a:solidFill>
                 <a:latin typeface="Calibri"/>
               </a:rPr>
-              <a:t>MIPF Boot Camp  |  Day 6  |  Tue 20 Oct 2026  |  Project finance modelling I: construction and funding</a:t>
+              <a:t>MIPF Boot Camp  |  Day 6  |  Wed 21 Oct 2026  |  Project finance modelling I: construction and funding</a:t>
             </a:r>
           </a:p>
         </p:txBody>
@@ -43460,7 +43460,7 @@
                 </a:solidFill>
                 <a:latin typeface="Calibri"/>
               </a:rPr>
-              <a:t>MIPF Boot Camp  |  Day 6  |  Tue 20 Oct 2026  |  Project finance modelling I: construction and funding</a:t>
+              <a:t>MIPF Boot Camp  |  Day 6  |  Wed 21 Oct 2026  |  Project finance modelling I: construction and funding</a:t>
             </a:r>
           </a:p>
         </p:txBody>
@@ -43768,7 +43768,7 @@
                 </a:solidFill>
                 <a:latin typeface="Calibri"/>
               </a:rPr>
-              <a:t>MIPF Boot Camp  |  Day 6  |  Tue 20 Oct 2026  |  Project finance modelling I: construction and funding</a:t>
+              <a:t>MIPF Boot Camp  |  Day 6  |  Wed 21 Oct 2026  |  Project finance modelling I: construction and funding</a:t>
             </a:r>
           </a:p>
         </p:txBody>
@@ -44414,7 +44414,7 @@
                 </a:solidFill>
                 <a:latin typeface="Calibri"/>
               </a:rPr>
-              <a:t>MIPF Boot Camp  |  Day 6  |  Tue 20 Oct 2026  |  Project finance modelling I: construction and funding</a:t>
+              <a:t>MIPF Boot Camp  |  Day 6  |  Wed 21 Oct 2026  |  Project finance modelling I: construction and funding</a:t>
             </a:r>
           </a:p>
         </p:txBody>
@@ -45241,7 +45241,7 @@
                 </a:solidFill>
                 <a:latin typeface="Calibri"/>
               </a:rPr>
-              <a:t>MIPF Boot Camp  |  Day 6  |  Tue 20 Oct 2026  |  Project finance modelling I: construction and funding</a:t>
+              <a:t>MIPF Boot Camp  |  Day 6  |  Wed 21 Oct 2026  |  Project finance modelling I: construction and funding</a:t>
             </a:r>
           </a:p>
         </p:txBody>
@@ -46157,7 +46157,7 @@
                 </a:solidFill>
                 <a:latin typeface="Calibri"/>
               </a:rPr>
-              <a:t>MIPF Boot Camp  |  Day 6  |  Tue 20 Oct 2026  |  Project finance modelling I: construction and funding</a:t>
+              <a:t>MIPF Boot Camp  |  Day 6  |  Wed 21 Oct 2026  |  Project finance modelling I: construction and funding</a:t>
             </a:r>
           </a:p>
         </p:txBody>
@@ -46841,7 +46841,7 @@
                 </a:solidFill>
                 <a:latin typeface="Calibri"/>
               </a:rPr>
-              <a:t>MIPF Boot Camp  |  Day 6  |  Tue 20 Oct 2026  |  Project finance modelling I: construction and funding</a:t>
+              <a:t>MIPF Boot Camp  |  Day 6  |  Wed 21 Oct 2026  |  Project finance modelling I: construction and funding</a:t>
             </a:r>
           </a:p>
         </p:txBody>
@@ -47796,7 +47796,7 @@
                 </a:solidFill>
                 <a:latin typeface="Calibri"/>
               </a:rPr>
-              <a:t>MIPF Boot Camp  |  Day 6  |  Tue 20 Oct 2026  |  Project finance modelling I: construction and funding</a:t>
+              <a:t>MIPF Boot Camp  |  Day 6  |  Wed 21 Oct 2026  |  Project finance modelling I: construction and funding</a:t>
             </a:r>
           </a:p>
         </p:txBody>
@@ -48550,7 +48550,7 @@
                 </a:solidFill>
                 <a:latin typeface="Calibri"/>
               </a:rPr>
-              <a:t>MIPF Boot Camp  |  Day 6  |  Tue 20 Oct 2026  |  Project finance modelling I: construction and funding</a:t>
+              <a:t>MIPF Boot Camp  |  Day 6  |  Wed 21 Oct 2026  |  Project finance modelling I: construction and funding</a:t>
             </a:r>
           </a:p>
         </p:txBody>
@@ -48858,7 +48858,7 @@
                 </a:solidFill>
                 <a:latin typeface="Calibri"/>
               </a:rPr>
-              <a:t>MIPF Boot Camp  |  Day 6  |  Tue 20 Oct 2026  |  Project finance modelling I: construction and funding</a:t>
+              <a:t>MIPF Boot Camp  |  Day 6  |  Wed 21 Oct 2026  |  Project finance modelling I: construction and funding</a:t>
             </a:r>
           </a:p>
         </p:txBody>
@@ -49561,7 +49561,7 @@
                 </a:solidFill>
                 <a:latin typeface="Calibri"/>
               </a:rPr>
-              <a:t>MIPF Boot Camp  |  Day 6  |  Tue 20 Oct 2026  |  Project finance modelling I: construction and funding</a:t>
+              <a:t>MIPF Boot Camp  |  Day 6  |  Wed 21 Oct 2026  |  Project finance modelling I: construction and funding</a:t>
             </a:r>
           </a:p>
         </p:txBody>
@@ -50154,7 +50154,7 @@
                 </a:solidFill>
                 <a:latin typeface="Calibri"/>
               </a:rPr>
-              <a:t>MIPF Boot Camp  |  Day 6  |  Tue 20 Oct 2026  |  Project finance modelling I: construction and funding</a:t>
+              <a:t>MIPF Boot Camp  |  Day 6  |  Wed 21 Oct 2026  |  Project finance modelling I: construction and funding</a:t>
             </a:r>
           </a:p>
         </p:txBody>
@@ -50558,7 +50558,7 @@
                 </a:solidFill>
                 <a:latin typeface="Calibri"/>
               </a:rPr>
-              <a:t>MIPF Boot Camp  |  Day 6  |  Tue 20 Oct 2026  |  Project finance modelling I: construction and funding</a:t>
+              <a:t>MIPF Boot Camp  |  Day 6  |  Wed 21 Oct 2026  |  Project finance modelling I: construction and funding</a:t>
             </a:r>
           </a:p>
         </p:txBody>
@@ -51377,7 +51377,7 @@
                 </a:solidFill>
                 <a:latin typeface="Calibri"/>
               </a:rPr>
-              <a:t>MIPF Boot Camp  |  Day 6  |  Tue 20 Oct 2026  |  Project finance modelling I: construction and funding</a:t>
+              <a:t>MIPF Boot Camp  |  Day 6  |  Wed 21 Oct 2026  |  Project finance modelling I: construction and funding</a:t>
             </a:r>
           </a:p>
         </p:txBody>
@@ -52392,7 +52392,7 @@
                 </a:solidFill>
                 <a:latin typeface="Calibri"/>
               </a:rPr>
-              <a:t>MIPF Boot Camp  |  Day 6  |  Tue 20 Oct 2026  |  Project finance modelling I: construction and funding</a:t>
+              <a:t>MIPF Boot Camp  |  Day 6  |  Wed 21 Oct 2026  |  Project finance modelling I: construction and funding</a:t>
             </a:r>
           </a:p>
         </p:txBody>
@@ -53034,7 +53034,7 @@
                 </a:solidFill>
                 <a:latin typeface="Calibri"/>
               </a:rPr>
-              <a:t>MIPF Boot Camp  |  Day 6  |  Tue 20 Oct 2026  |  Project finance modelling I: construction and funding</a:t>
+              <a:t>MIPF Boot Camp  |  Day 6  |  Wed 21 Oct 2026  |  Project finance modelling I: construction and funding</a:t>
             </a:r>
           </a:p>
         </p:txBody>
